--- a/docs/CloudPulse-AI_Architecture.pptx
+++ b/docs/CloudPulse-AI_Architecture.pptx
@@ -1431,7 +1431,7 @@
                 <a:ea typeface="Arial" pitchFamily="34" charset="-122"/>
                 <a:cs typeface="Arial" pitchFamily="34" charset="-120"/>
               </a:rPr>
-              <a:t>Internal now, SaaS-ready  •  Python + FastAPI on Lambda  •  Angular 18  •  Amazon Bedrock  •  Aurora Serverless v2</a:t>
+              <a:t>Python + FastAPI on Lambda  •  Angular 18  •  Bedrock AgentCore + Nova 2 Lite  •  Aurora Serverless v2  •  Terraform</a:t>
             </a:r>
             <a:endParaRPr lang="en-US" sz="1300" dirty="0"/>
           </a:p>
@@ -1771,7 +1771,7 @@
                 <a:ea typeface="Arial" pitchFamily="34" charset="-122"/>
                 <a:cs typeface="Arial" pitchFamily="34" charset="-120"/>
               </a:rPr>
-              <a:t>Remediate</a:t>
+              <a:t>Explain</a:t>
             </a:r>
             <a:endParaRPr lang="en-US" sz="1200" dirty="0"/>
           </a:p>
@@ -1980,7 +1980,7 @@
                 <a:ea typeface="Arial" pitchFamily="34" charset="-122"/>
                 <a:cs typeface="Arial" pitchFamily="34" charset="-120"/>
               </a:rPr>
-              <a:t>v1.0 • August 2026 • All deliverables: Plan &amp; Tech Stack (docx), Backlog (xlsx), Engineering Guide (docx)</a:t>
+              <a:t>v2.0, as built • October 2026 • Companions: README, Plan &amp; Tech Stack (docx), Engineering Guide (docx), Backlog (xlsx)</a:t>
             </a:r>
             <a:endParaRPr lang="en-US" sz="1000" dirty="0"/>
           </a:p>
@@ -2090,7 +2090,7 @@
                 <a:ea typeface="Arial" pitchFamily="34" charset="-122"/>
                 <a:cs typeface="Arial" pitchFamily="34" charset="-120"/>
               </a:rPr>
-              <a:t>All CloudPulse components deploy in your hub AWS account; each spoke account gets one read-only IAM role via CloudFormation.</a:t>
+              <a:t>All CloudPulse components deploy in one AWS account; each added account gets one read-only IAM role via CloudFormation.</a:t>
             </a:r>
             <a:endParaRPr lang="en-US" sz="1200" dirty="0"/>
           </a:p>
@@ -2374,7 +2374,7 @@
                 <a:ea typeface="Arial" pitchFamily="34" charset="-122"/>
                 <a:cs typeface="Arial" pitchFamily="34" charset="-120"/>
               </a:rPr>
-              <a:t>CloudFront + WAF</a:t>
+              <a:t>CloudFront (OAC)</a:t>
             </a:r>
             <a:endParaRPr lang="en-US" sz="850" dirty="0"/>
           </a:p>
@@ -2526,7 +2526,7 @@
                 <a:ea typeface="Arial" pitchFamily="34" charset="-122"/>
                 <a:cs typeface="Arial" pitchFamily="34" charset="-120"/>
               </a:rPr>
-              <a:t>(SSO, JWT)</a:t>
+              <a:t>(3 role groups, JWT)</a:t>
             </a:r>
             <a:endParaRPr lang="en-US" sz="850" dirty="0"/>
           </a:p>
@@ -3306,7 +3306,7 @@
                 <a:ea typeface="Arial" pitchFamily="34" charset="-122"/>
                 <a:cs typeface="Arial" pitchFamily="34" charset="-120"/>
               </a:rPr>
-              <a:t>Scan Lambdas</a:t>
+              <a:t>Scan worker</a:t>
             </a:r>
             <a:endParaRPr lang="en-US" sz="850" dirty="0"/>
           </a:p>
@@ -3326,7 +3326,7 @@
                 <a:ea typeface="Arial" pitchFamily="34" charset="-122"/>
                 <a:cs typeface="Arial" pitchFamily="34" charset="-120"/>
               </a:rPr>
-              <a:t>(account × region × service)</a:t>
+              <a:t>(account × region)</a:t>
             </a:r>
             <a:endParaRPr lang="en-US" sz="850" dirty="0"/>
           </a:p>
@@ -3657,7 +3657,7 @@
                 <a:ea typeface="Arial" pitchFamily="34" charset="-122"/>
                 <a:cs typeface="Arial" pitchFamily="34" charset="-120"/>
               </a:rPr>
-              <a:t>Bedrock</a:t>
+              <a:t>AgentCore + Nova</a:t>
             </a:r>
             <a:endParaRPr lang="en-US" sz="800" dirty="0"/>
           </a:p>
@@ -3677,7 +3677,7 @@
                 <a:ea typeface="Arial" pitchFamily="34" charset="-122"/>
                 <a:cs typeface="Arial" pitchFamily="34" charset="-120"/>
               </a:rPr>
-              <a:t>insights (R2+)</a:t>
+              <a:t>digest, suggestions</a:t>
             </a:r>
             <a:endParaRPr lang="en-US" sz="800" dirty="0"/>
           </a:p>
@@ -4115,7 +4115,7 @@
                   <a:srgbClr val="5B6673"/>
                 </a:solidFill>
               </a:rPr>
-              <a:t>Launch: single account — CloudPulse deploys inside it; scan Lambdas use a local read-only role (no AssumeRole). Cross-account mode activates as accounts are added.</a:t>
+              <a:t>Same-account mode: CloudPulse scans the account it runs in with its own read-only roles. Cross-account mode activates as accounts are added.</a:t>
             </a:r>
             <a:endParaRPr lang="en-US" sz="750" dirty="0"/>
           </a:p>
@@ -4267,7 +4267,7 @@
                 <a:ea typeface="Arial" pitchFamily="34" charset="-122"/>
                 <a:cs typeface="Arial" pitchFamily="34" charset="-120"/>
               </a:rPr>
-              <a:t>CloudPulseScannerRole</a:t>
+              <a:t>cloudpulse-scanner</a:t>
             </a:r>
             <a:endParaRPr lang="en-US" sz="800" dirty="0"/>
           </a:p>
@@ -4987,7 +4987,7 @@
                 <a:ea typeface="Arial" pitchFamily="34" charset="-122"/>
                 <a:cs typeface="Arial" pitchFamily="34" charset="-120"/>
               </a:rPr>
-              <a:t>The core loop: discover → diff → validate → attribute → notify. Runs 02:00 IST daily plus on-demand from the UI.</a:t>
+              <a:t>The core loop: discover → diff → validate → attribute → notify. Runs 06:00 UTC daily plus on-demand from the UI.</a:t>
             </a:r>
             <a:endParaRPr lang="en-US" sz="1200" dirty="0"/>
           </a:p>
@@ -5375,7 +5375,7 @@
                   <a:srgbClr val="1A2433"/>
                 </a:solidFill>
               </a:rPr>
-              <a:t>Step Functions Map: one branch per (account × service group)</a:t>
+              <a:t>Step Functions: one unit of work per (account × region)</a:t>
             </a:r>
             <a:endParaRPr lang="en-US" sz="1050" dirty="0"/>
           </a:p>
@@ -5581,7 +5581,7 @@
                   <a:srgbClr val="1A2433"/>
                 </a:solidFill>
               </a:rPr>
-              <a:t>Scan Lambda assumes spoke role; Tagging API sweep + per-service enrichers</a:t>
+              <a:t>Scan worker uses its own role or assumes the scanner role; Tagging API + Cloud Control sweep, 10 enrichers</a:t>
             </a:r>
             <a:endParaRPr lang="en-US" sz="1050" dirty="0"/>
           </a:p>
@@ -5969,7 +5969,7 @@
                   <a:srgbClr val="1A2433"/>
                 </a:solidFill>
               </a:rPr>
-              <a:t>Upsert into Postgres; diff vs last scan opens/closes findings</a:t>
+              <a:t>Upsert + diff; SQS fan-out to compliance (findings, score) and ownership workers</a:t>
             </a:r>
             <a:endParaRPr lang="en-US" sz="1050" dirty="0"/>
           </a:p>
@@ -6175,7 +6175,7 @@
                   <a:srgbClr val="1A2433"/>
                 </a:solidFill>
               </a:rPr>
-              <a:t>Ownership worker mines CloudTrail: creator → frequent modifier → manual queue</a:t>
+              <a:t>Ownership worker reads CloudTrail write events: creator → fallback chain → unattributed</a:t>
             </a:r>
             <a:endParaRPr lang="en-US" sz="1050" dirty="0"/>
           </a:p>
@@ -6381,7 +6381,7 @@
                   <a:srgbClr val="1A2433"/>
                 </a:solidFill>
               </a:rPr>
-              <a:t>SES cadence day 0/2/4 + dashboard bell; unresolved after 4th interval → escalate</a:t>
+              <a:t>SES cadence day 0/2/4 (08:00 UTC); still open at day 4 → escalation flag</a:t>
             </a:r>
             <a:endParaRPr lang="en-US" sz="1050" dirty="0"/>
           </a:p>
@@ -6587,7 +6587,7 @@
                   <a:srgbClr val="1A2433"/>
                 </a:solidFill>
               </a:rPr>
-              <a:t>Scan history, durations, counts → History page; alarms on failures</a:t>
+              <a:t>Scan history, durations, added/changed/removed counts → Scan operations page</a:t>
             </a:r>
             <a:endParaRPr lang="en-US" sz="1050" dirty="0"/>
           </a:p>
@@ -6721,7 +6721,7 @@
                 <a:ea typeface="Arial" pitchFamily="34" charset="-122"/>
                 <a:cs typeface="Arial" pitchFamily="34" charset="-120"/>
               </a:rPr>
-              <a:t>Launch: same-account mode (local read-only role, no AssumeRole). Growth: deploy one CloudFormation stack per new account, register it with its scan-region list (default us-east-1). Access-key auth is deliberately not supported.</a:t>
+              <a:t>Same-account mode: CloudPulse scans its own account with its own read-only roles. Growth: deploy one CloudFormation stack per new account and register it with its scan regions. Access keys are deliberately not supported.</a:t>
             </a:r>
             <a:endParaRPr lang="en-US" sz="1200" dirty="0"/>
           </a:p>
@@ -6919,7 +6919,7 @@
                 <a:ea typeface="Arial" pitchFamily="34" charset="-122"/>
                 <a:cs typeface="Arial" pitchFamily="34" charset="-120"/>
               </a:rPr>
-              <a:t>Scan / remediation</a:t>
+              <a:t>Scan and worker</a:t>
             </a:r>
             <a:endParaRPr lang="en-US" sz="850" dirty="0"/>
           </a:p>
@@ -7025,7 +7025,7 @@
                 <a:ea typeface="Arial" pitchFamily="34" charset="-122"/>
                 <a:cs typeface="Arial" pitchFamily="34" charset="-120"/>
               </a:rPr>
-              <a:t>(scoped to CloudPulse* roles)</a:t>
+              <a:t>(scoped to cloudpulse-scanner)</a:t>
             </a:r>
             <a:endParaRPr lang="en-US" sz="850" dirty="0"/>
           </a:p>
@@ -7082,7 +7082,7 @@
                   <a:srgbClr val="1A2433"/>
                 </a:solidFill>
               </a:rPr>
-              <a:t>Per-tenant ExternalId (confused-deputy guard)</a:t>
+              <a:t>Platform-generated ExternalId per account (confused-deputy guard)</a:t>
             </a:r>
             <a:endParaRPr lang="en-US" sz="1100" dirty="0"/>
           </a:p>
@@ -7100,7 +7100,7 @@
                   <a:srgbClr val="1A2433"/>
                 </a:solidFill>
               </a:rPr>
-              <a:t>Read-only scanner: SecurityAudit + ViewOnlyAccess + tag:GetResources</a:t>
+              <a:t>Read-only scanner: an explicit Describe/Get/List list, checked by a unit test</a:t>
             </a:r>
             <a:endParaRPr lang="en-US" sz="1100" dirty="0"/>
           </a:p>
@@ -7118,7 +7118,7 @@
                   <a:srgbClr val="1A2433"/>
                 </a:solidFill>
               </a:rPr>
-              <a:t>Separate CloudPulseRemediatorRole (R2), tag-write only, opt-in per account</a:t>
+              <a:t>No write role exists: remediation is out of scope by design</a:t>
             </a:r>
             <a:endParaRPr lang="en-US" sz="1100" dirty="0"/>
           </a:p>
@@ -7136,7 +7136,7 @@
                   <a:srgbClr val="1A2433"/>
                 </a:solidFill>
               </a:rPr>
-              <a:t>Sessions 15 min, all calls in spoke CloudTrail</a:t>
+              <a:t>Sessions 15 min, all calls in the target account's CloudTrail</a:t>
             </a:r>
             <a:endParaRPr lang="en-US" sz="1100" dirty="0"/>
           </a:p>
@@ -7288,7 +7288,7 @@
                 <a:ea typeface="Arial" pitchFamily="34" charset="-122"/>
                 <a:cs typeface="Arial" pitchFamily="34" charset="-120"/>
               </a:rPr>
-              <a:t>Launch account — CloudPulse hub deploys INSIDE it</a:t>
+              <a:t>Same account — CloudPulse runs INSIDE it</a:t>
             </a:r>
             <a:endParaRPr lang="en-US" sz="1100" dirty="0"/>
           </a:p>
@@ -7348,7 +7348,7 @@
                   <a:srgbClr val="1A2433"/>
                 </a:solidFill>
               </a:rPr>
-              <a:t>Local read-only role (no AssumeRole)</a:t>
+              <a:t>Own read-only roles (no AssumeRole)</a:t>
             </a:r>
             <a:endParaRPr lang="en-US" sz="900" dirty="0"/>
           </a:p>
@@ -7546,7 +7546,7 @@
                   <a:srgbClr val="1A2433"/>
                 </a:solidFill>
               </a:rPr>
-              <a:t>CloudPulseScannerRole</a:t>
+              <a:t>cloudpulse-scanner</a:t>
             </a:r>
             <a:endParaRPr lang="en-US" sz="900" dirty="0"/>
           </a:p>
@@ -7744,7 +7744,7 @@
                   <a:srgbClr val="1A2433"/>
                 </a:solidFill>
               </a:rPr>
-              <a:t>CloudPulseScannerRole</a:t>
+              <a:t>cloudpulse-scanner</a:t>
             </a:r>
             <a:endParaRPr lang="en-US" sz="900" dirty="0"/>
           </a:p>
@@ -7923,7 +7923,7 @@
                 <a:ea typeface="Arial" pitchFamily="34" charset="-122"/>
                 <a:cs typeface="Arial" pitchFamily="34" charset="-120"/>
               </a:rPr>
-              <a:t>Cost Governance &amp; GenAI Layer (Release 2–3)</a:t>
+              <a:t>Cost Governance &amp; AI Layer</a:t>
             </a:r>
             <a:endParaRPr lang="en-US" sz="2600" dirty="0"/>
           </a:p>
@@ -7962,7 +7962,7 @@
                 <a:ea typeface="Arial" pitchFamily="34" charset="-122"/>
                 <a:cs typeface="Arial" pitchFamily="34" charset="-120"/>
               </a:rPr>
-              <a:t>Cost signals come from native AWS services; Bedrock explains and recommends — it never holds credentials or executes changes.</a:t>
+              <a:t>Cost signals come from native AWS services; the AI explains and recommends — it never holds credentials or executes changes.</a:t>
             </a:r>
             <a:endParaRPr lang="en-US" sz="1200" dirty="0"/>
           </a:p>
@@ -8089,7 +8089,7 @@
                 <a:ea typeface="Arial" pitchFamily="34" charset="-122"/>
                 <a:cs typeface="Arial" pitchFamily="34" charset="-120"/>
               </a:rPr>
-              <a:t>R2</a:t>
+              <a:t>P1/P2</a:t>
             </a:r>
             <a:endParaRPr lang="en-US" sz="900" dirty="0"/>
           </a:p>
@@ -8175,7 +8175,7 @@
                 <a:ea typeface="Arial" pitchFamily="34" charset="-122"/>
                 <a:cs typeface="Arial" pitchFamily="34" charset="-120"/>
               </a:rPr>
-              <a:t>spend by project tag</a:t>
+              <a:t>daily spend per account</a:t>
             </a:r>
             <a:endParaRPr lang="en-US" sz="850" dirty="0"/>
           </a:p>
@@ -8241,7 +8241,7 @@
                 <a:ea typeface="Arial" pitchFamily="34" charset="-122"/>
                 <a:cs typeface="Arial" pitchFamily="34" charset="-120"/>
               </a:rPr>
-              <a:t>AWS Budgets</a:t>
+              <a:t>Budgets per SDA</a:t>
             </a:r>
             <a:endParaRPr lang="en-US" sz="850" dirty="0"/>
           </a:p>
@@ -8261,7 +8261,7 @@
                 <a:ea typeface="Arial" pitchFamily="34" charset="-122"/>
                 <a:cs typeface="Arial" pitchFamily="34" charset="-120"/>
               </a:rPr>
-              <a:t>auto-created per project</a:t>
+              <a:t>auto-created in CloudPulse</a:t>
             </a:r>
             <a:endParaRPr lang="en-US" sz="850" dirty="0"/>
           </a:p>
@@ -8281,7 +8281,7 @@
                 <a:ea typeface="Arial" pitchFamily="34" charset="-122"/>
                 <a:cs typeface="Arial" pitchFamily="34" charset="-120"/>
               </a:rPr>
-              <a:t>80% / 100% alerts</a:t>
+              <a:t>overrun → finding</a:t>
             </a:r>
             <a:endParaRPr lang="en-US" sz="850" dirty="0"/>
           </a:p>
@@ -8347,7 +8347,7 @@
                 <a:ea typeface="Arial" pitchFamily="34" charset="-122"/>
                 <a:cs typeface="Arial" pitchFamily="34" charset="-120"/>
               </a:rPr>
-              <a:t>Compute Optimizer</a:t>
+              <a:t>CloudWatch metrics</a:t>
             </a:r>
             <a:endParaRPr lang="en-US" sz="850" dirty="0"/>
           </a:p>
@@ -8367,7 +8367,7 @@
                 <a:ea typeface="Arial" pitchFamily="34" charset="-122"/>
                 <a:cs typeface="Arial" pitchFamily="34" charset="-120"/>
               </a:rPr>
-              <a:t>rightsizing signals</a:t>
+              <a:t>rightsizing evidence</a:t>
             </a:r>
             <a:endParaRPr lang="en-US" sz="850" dirty="0"/>
           </a:p>
@@ -8410,7 +8410,7 @@
                   <a:srgbClr val="1A2433"/>
                 </a:solidFill>
               </a:rPr>
-              <a:t>Overrun detection: forecast + actual vs project budget → findings pipeline (same lifecycle as tag findings)</a:t>
+              <a:t>Overrun detection: actual spend vs SDA budget → findings pipeline (same lifecycle as tag findings)</a:t>
             </a:r>
             <a:endParaRPr lang="en-US" sz="1100" dirty="0"/>
           </a:p>
@@ -8431,7 +8431,7 @@
                   <a:srgbClr val="1A2433"/>
                 </a:solidFill>
               </a:rPr>
-              <a:t>Unused resources: idle EC2, unattached EBS, orphaned EIPs, idle RDS → savings estimates</a:t>
+              <a:t>Utilization: active vs idle from resource state; IAM hygiene flags unused principals weekly</a:t>
             </a:r>
             <a:endParaRPr lang="en-US" sz="1100" dirty="0"/>
           </a:p>
@@ -8452,7 +8452,7 @@
                   <a:srgbClr val="1A2433"/>
                 </a:solidFill>
               </a:rPr>
-              <a:t>Cost dashboard: spend by project / SDA / environment with drill-down; sandbox utilization % (R3)</a:t>
+              <a:t>Cost dashboard: daily spend by account and SDA; forecasts with their backtest error</a:t>
             </a:r>
             <a:endParaRPr lang="en-US" sz="1100" dirty="0"/>
           </a:p>
@@ -8473,7 +8473,7 @@
                   <a:srgbClr val="1A2433"/>
                 </a:solidFill>
               </a:rPr>
-              <a:t>Recommendations: shutdown, cleanup, rightsize (m5.2xlarge → m5.xlarge), reserved capacity</a:t>
+              <a:t>Rightsizing: low and steady CPU → one size down, with evidence and an estimated saving</a:t>
             </a:r>
             <a:endParaRPr lang="en-US" sz="1100" dirty="0"/>
           </a:p>
@@ -8539,7 +8539,7 @@
                 <a:ea typeface="Arial" pitchFamily="34" charset="-122"/>
                 <a:cs typeface="Arial" pitchFamily="34" charset="-120"/>
               </a:rPr>
-              <a:t>GenAI on Amazon Bedrock (Claude)</a:t>
+              <a:t>AI on Bedrock AgentCore + Nova 2 Lite</a:t>
             </a:r>
             <a:endParaRPr lang="en-US" sz="1100" dirty="0"/>
           </a:p>
@@ -8600,7 +8600,7 @@
                 <a:ea typeface="Arial" pitchFamily="34" charset="-122"/>
                 <a:cs typeface="Arial" pitchFamily="34" charset="-120"/>
               </a:rPr>
-              <a:t>R2+</a:t>
+              <a:t>P1/P2</a:t>
             </a:r>
             <a:endParaRPr lang="en-US" sz="900" dirty="0"/>
           </a:p>
@@ -8666,7 +8666,7 @@
                 <a:ea typeface="Arial" pitchFamily="34" charset="-122"/>
                 <a:cs typeface="Arial" pitchFamily="34" charset="-120"/>
               </a:rPr>
-              <a:t>Bedrock</a:t>
+              <a:t>AgentCore Runtime</a:t>
             </a:r>
             <a:endParaRPr lang="en-US" sz="850" dirty="0"/>
           </a:p>
@@ -8686,7 +8686,7 @@
                 <a:ea typeface="Arial" pitchFamily="34" charset="-122"/>
                 <a:cs typeface="Arial" pitchFamily="34" charset="-120"/>
               </a:rPr>
-              <a:t>Converse API</a:t>
+              <a:t>Converse tool loop</a:t>
             </a:r>
             <a:endParaRPr lang="en-US" sz="850" dirty="0"/>
           </a:p>
@@ -8752,7 +8752,7 @@
                 <a:ea typeface="Arial" pitchFamily="34" charset="-122"/>
                 <a:cs typeface="Arial" pitchFamily="34" charset="-120"/>
               </a:rPr>
-              <a:t>Insight jobs</a:t>
+              <a:t>Daily workers</a:t>
             </a:r>
             <a:endParaRPr lang="en-US" sz="850" dirty="0"/>
           </a:p>
@@ -8772,7 +8772,7 @@
                 <a:ea typeface="Arial" pitchFamily="34" charset="-122"/>
                 <a:cs typeface="Arial" pitchFamily="34" charset="-120"/>
               </a:rPr>
-              <a:t>(nightly digest)</a:t>
+              <a:t>(digest, suggester)</a:t>
             </a:r>
             <a:endParaRPr lang="en-US" sz="850" dirty="0"/>
           </a:p>
@@ -8858,7 +8858,7 @@
                 <a:ea typeface="Arial" pitchFamily="34" charset="-122"/>
                 <a:cs typeface="Arial" pitchFamily="34" charset="-120"/>
               </a:rPr>
-              <a:t>for NL Q&amp;A (R3)</a:t>
+              <a:t>allowlisted GETs only</a:t>
             </a:r>
             <a:endParaRPr lang="en-US" sz="850" dirty="0"/>
           </a:p>
@@ -8901,7 +8901,7 @@
                   <a:srgbClr val="1A2433"/>
                 </a:solidFill>
               </a:rPr>
-              <a:t>Findings digest: nightly summary of top findings + cost deltas → dashboard card + weekly email</a:t>
+              <a:t>Insight digest: daily summary of top findings + spend → overview card, grounded before display</a:t>
             </a:r>
             <a:endParaRPr lang="en-US" sz="1100" dirty="0"/>
           </a:p>
@@ -8922,7 +8922,7 @@
                   <a:srgbClr val="1A2433"/>
                 </a:solidFill>
               </a:rPr>
-              <a:t>Remediation suggester: drafts action + blast-radius note per finding class; human approves</a:t>
+              <a:t>Remediation suggester: one suggestion + blast-radius note per finding; people act on it</a:t>
             </a:r>
             <a:endParaRPr lang="en-US" sz="1100" dirty="0"/>
           </a:p>
@@ -8943,7 +8943,7 @@
                   <a:srgbClr val="1A2433"/>
                 </a:solidFill>
               </a:rPr>
-              <a:t>NL Q&amp;A (R3): “Which untagged prod resources cost most last month?” — tool-use against CloudPulse API, tenant-scoped, answers cite ARNs</a:t>
+              <a:t>Grounding gate: deterministic code rejects any invented ARN or figure; rejections are recorded, never shown</a:t>
             </a:r>
             <a:endParaRPr lang="en-US" sz="1100" dirty="0"/>
           </a:p>
@@ -8964,7 +8964,7 @@
                   <a:srgbClr val="1A2433"/>
                 </a:solidFill>
               </a:rPr>
-              <a:t>Cost control: Haiku for classification, Sonnet for digests; cached outputs; Bedrock budget alarm</a:t>
+              <a:t>Cost control: per-run token cap; item-wise outputs keep validated items; Guardrail on every call</a:t>
             </a:r>
             <a:endParaRPr lang="en-US" sz="1100" dirty="0"/>
           </a:p>
@@ -9074,7 +9074,7 @@
                 <a:ea typeface="Arial" pitchFamily="34" charset="-122"/>
                 <a:cs typeface="Arial" pitchFamily="34" charset="-120"/>
               </a:rPr>
-              <a:t>Monorepo: /infra (Terraform), /backend (FastAPI + workers), /frontend (Angular), /connectors. Trunk-based; deploy on merge to main.</a:t>
+              <a:t>Monorepo: /infra (Terraform), /backend (FastAPI + workers), /frontend (Angular), /agents, /specs. Trunk-based on pods/pod73.</a:t>
             </a:r>
             <a:endParaRPr lang="en-US" sz="1200" dirty="0"/>
           </a:p>
@@ -9137,7 +9137,7 @@
                   <a:srgbClr val="232F3E"/>
                 </a:solidFill>
               </a:rPr>
-              <a:t>Push / PR</a:t>
+              <a:t>Pull request</a:t>
             </a:r>
             <a:endParaRPr lang="en-US" sz="1300" dirty="0"/>
           </a:p>
@@ -9176,7 +9176,7 @@
                   <a:srgbClr val="1A2433"/>
                 </a:solidFill>
               </a:rPr>
-              <a:t>Lint • mypy • unit tests (moto) • Angular build • tf validate &amp; plan</a:t>
+              <a:t>16 required checks: lint • types • unit • integration • e2e • tf • contract • evals • AI review</a:t>
             </a:r>
             <a:endParaRPr lang="en-US" sz="1000" dirty="0"/>
           </a:p>
@@ -9263,7 +9263,7 @@
                   <a:srgbClr val="232F3E"/>
                 </a:solidFill>
               </a:rPr>
-              <a:t>Merge to main</a:t>
+              <a:t>Merge to pods/pod73</a:t>
             </a:r>
             <a:endParaRPr lang="en-US" sz="1300" dirty="0"/>
           </a:p>
@@ -9302,7 +9302,7 @@
                   <a:srgbClr val="1A2433"/>
                 </a:solidFill>
               </a:rPr>
-              <a:t>Integration tests (LocalStack) • package Lambdas • build SPA</a:t>
+              <a:t>Trunk stays green; automatic dev deploy is off (DEV_AUTO_DEPLOY=false)</a:t>
             </a:r>
             <a:endParaRPr lang="en-US" sz="1000" dirty="0"/>
           </a:p>
@@ -9389,7 +9389,7 @@
                   <a:srgbClr val="232F3E"/>
                 </a:solidFill>
               </a:rPr>
-              <a:t>Deploy dev</a:t>
+              <a:t>Deploy dev (manual)</a:t>
             </a:r>
             <a:endParaRPr lang="en-US" sz="1300" dirty="0"/>
           </a:p>
@@ -9428,7 +9428,7 @@
                   <a:srgbClr val="1A2433"/>
                 </a:solidFill>
               </a:rPr>
-              <a:t>terraform apply (auto) • Alembic migrations • smoke tests</a:t>
+              <a:t>build • terraform apply (optional NAT egress) • migrations • health + Playwright smoke</a:t>
             </a:r>
             <a:endParaRPr lang="en-US" sz="1000" dirty="0"/>
           </a:p>
@@ -9515,7 +9515,7 @@
                   <a:srgbClr val="232F3E"/>
                 </a:solidFill>
               </a:rPr>
-              <a:t>Deploy prod</a:t>
+              <a:t>Teardown</a:t>
             </a:r>
             <a:endParaRPr lang="en-US" sz="1300" dirty="0"/>
           </a:p>
@@ -9554,7 +9554,7 @@
                   <a:srgbClr val="1A2433"/>
                 </a:solidFill>
               </a:rPr>
-              <a:t>Manual approval gate • apply • CloudFront invalidation • canary alarm watch</a:t>
+              <a:t>ops/teardown.sh dev • sweep against the pre-deploy baseline • zero cost</a:t>
             </a:r>
             <a:endParaRPr lang="en-US" sz="1000" dirty="0"/>
           </a:p>
@@ -9620,7 +9620,7 @@
                 <a:ea typeface="Arial" pitchFamily="34" charset="-122"/>
                 <a:cs typeface="Arial" pitchFamily="34" charset="-120"/>
               </a:rPr>
-              <a:t>dev environment (hub account: cloudpulse-dev)</a:t>
+              <a:t>dev — the one environment, deployed per working session</a:t>
             </a:r>
             <a:endParaRPr lang="en-US" sz="1100" dirty="0"/>
           </a:p>
@@ -9686,7 +9686,7 @@
                 <a:ea typeface="Arial" pitchFamily="34" charset="-122"/>
                 <a:cs typeface="Arial" pitchFamily="34" charset="-120"/>
               </a:rPr>
-              <a:t>prod environment (hub account: cloudpulse-prod)</a:t>
+              <a:t>prod root module — kept in the repo, unused by decision</a:t>
             </a:r>
             <a:endParaRPr lang="en-US" sz="1100" dirty="0"/>
           </a:p>
@@ -10086,7 +10086,7 @@
                   <a:srgbClr val="1A2433"/>
                 </a:solidFill>
               </a:rPr>
-              <a:t>Separate hub accounts for dev and prod; spokes onboard to prod only</a:t>
+              <a:t>One environment by decision: dev is deployed for a session, then torn down</a:t>
             </a:r>
             <a:endParaRPr lang="en-US" sz="1050" dirty="0"/>
           </a:p>
@@ -10104,7 +10104,7 @@
                   <a:srgbClr val="1A2433"/>
                 </a:solidFill>
               </a:rPr>
-              <a:t>GitHub OIDC federation → short-lived deploy roles per environment</a:t>
+              <a:t>GitHub OIDC federation → short-lived deploy role, no stored keys</a:t>
             </a:r>
             <a:endParaRPr lang="en-US" sz="1050" dirty="0"/>
           </a:p>
@@ -10122,7 +10122,7 @@
                   <a:srgbClr val="1A2433"/>
                 </a:solidFill>
               </a:rPr>
-              <a:t>Terraform state in S3 + DynamoDB lock, one state per env</a:t>
+              <a:t>Terraform state in S3 + DynamoDB lock</a:t>
             </a:r>
             <a:endParaRPr lang="en-US" sz="1050" dirty="0"/>
           </a:p>
@@ -10162,7 +10162,7 @@
                   <a:srgbClr val="1A2433"/>
                 </a:solidFill>
               </a:rPr>
-              <a:t>Rollback: Lambda aliases + previous artifact re-deploy; DB via expand-contract migrations</a:t>
+              <a:t>Rollback: redeploy the previous commit; migrations are additive-only</a:t>
             </a:r>
             <a:endParaRPr lang="en-US" sz="1050" dirty="0"/>
           </a:p>
@@ -10180,7 +10180,7 @@
                   <a:srgbClr val="1A2433"/>
                 </a:solidFill>
               </a:rPr>
-              <a:t>Observability: CloudWatch dashboards + alarms → SNS → email/Slack</a:t>
+              <a:t>Observability: structured logs + correlation IDs; dashboards and alarms are optional (P2, off)</a:t>
             </a:r>
             <a:endParaRPr lang="en-US" sz="1050" dirty="0"/>
           </a:p>
@@ -10198,7 +10198,7 @@
                   <a:srgbClr val="1A2433"/>
                 </a:solidFill>
               </a:rPr>
-              <a:t>Full pipeline YAML and runbooks in the Engineering Guide (docx)</a:t>
+              <a:t>Full pipeline, provisioning and teardown in the Engineering Guide and README</a:t>
             </a:r>
             <a:endParaRPr lang="en-US" sz="1050" dirty="0"/>
           </a:p>
